--- a/deliverables/new-video-4/Recording_Support_Deck.pptx
+++ b/deliverables/new-video-4/Recording_Support_Deck.pptx
@@ -1063,7 +1063,7 @@
           <a:lstStyle/>
           <a:p>
             <a:r>
-              <a:t>06_Receipts_Three_Eras.png  (V06)</a:t>
+              <a:t>06_Receipts_Three_Proofs.png  (V06)</a:t>
             </a:r>
           </a:p>
           <a:p/>
@@ -1075,7 +1075,7 @@
           <a:p/>
           <a:p>
             <a:r>
-              <a:t>Purpose: Proves the Claim with evidence from different eras, and models the scoping language that keeps each one defensible.</a:t>
+              <a:t>Purpose: Proves the Claim from three different organizations and three different problems, and models the scoping language that keeps each one defensible.</a:t>
             </a:r>
           </a:p>
           <a:p>
@@ -1085,7 +1085,7 @@
           </a:p>
           <a:p>
             <a:r>
-              <a:t>Hold: 11 to 13 seconds</a:t>
+              <a:t>Hold: 12 to 14 seconds. Each spoken Receipt now carries its own context, so this frame stays up longer than the others.</a:t>
             </a:r>
           </a:p>
         </p:txBody>
@@ -7061,7 +7061,7 @@
                 <a:ea typeface="Montserrat"/>
                 <a:cs typeface="Montserrat"/>
               </a:rPr>
-              <a:t>ENTERPRISE TECHNOLOGY</a:t>
+              <a:t>GLOBAL SOFTWARE</a:t>
             </a:r>
           </a:p>
         </p:txBody>
@@ -7102,7 +7102,7 @@
                 <a:ea typeface="Montserrat"/>
                 <a:cs typeface="Montserrat"/>
               </a:rPr>
-              <a:t>Onboarding: one integration measure moved 47 to 75.</a:t>
+              <a:t>Two readings disagreed. Integration moved 47 to 75.</a:t>
             </a:r>
           </a:p>
         </p:txBody>
@@ -7143,7 +7143,7 @@
                 <a:ea typeface="Montserrat"/>
                 <a:cs typeface="Montserrat"/>
               </a:rPr>
-              <a:t>POST-ACQUISITION</a:t>
+              <a:t>AN ACQUISITION</a:t>
             </a:r>
           </a:p>
         </p:txBody>
@@ -7225,7 +7225,7 @@
                 <a:ea typeface="Montserrat"/>
                 <a:cs typeface="Montserrat"/>
               </a:rPr>
-              <a:t>CAPABILITY WORK</a:t>
+              <a:t>GLOBAL LIFE SCIENCES</a:t>
             </a:r>
           </a:p>
         </p:txBody>
@@ -7266,7 +7266,7 @@
                 <a:ea typeface="Montserrat"/>
                 <a:cs typeface="Montserrat"/>
               </a:rPr>
-              <a:t>1,000+ managers through programs I built or led.</a:t>
+              <a:t>Built the capability function that did not exist.</a:t>
             </a:r>
           </a:p>
         </p:txBody>
